--- a/media/exports/reports/2026-05/volunteers.pptx
+++ b/media/exports/reports/2026-05/volunteers.pptx
@@ -200,19 +200,19 @@
                   <c:v>Volunteer coordinator</c:v>
                 </c:pt>
                 <c:pt idx="1">
+                  <c:v>Digital literacy</c:v>
+                </c:pt>
+                <c:pt idx="2">
                   <c:v>Community meals</c:v>
                 </c:pt>
-                <c:pt idx="2">
+                <c:pt idx="3">
+                  <c:v>Housing support</c:v>
+                </c:pt>
+                <c:pt idx="4">
                   <c:v>Youth outreach</c:v>
                 </c:pt>
-                <c:pt idx="3">
+                <c:pt idx="5">
                   <c:v>Mental health first aid</c:v>
-                </c:pt>
-                <c:pt idx="4">
-                  <c:v>Digital literacy</c:v>
-                </c:pt>
-                <c:pt idx="5">
-                  <c:v>Housing support</c:v>
                 </c:pt>
               </c:strCache>
             </c:strRef>
@@ -224,22 +224,22 @@
                 <c:formatCode>#,##0;[Red](#,##0)</c:formatCode>
                 <c:ptCount val="6"/>
                 <c:pt idx="0">
-                  <c:v>104.5</c:v>
+                  <c:v>95.0</c:v>
                 </c:pt>
                 <c:pt idx="1">
-                  <c:v>118.0</c:v>
+                  <c:v>124.5</c:v>
                 </c:pt>
                 <c:pt idx="2">
-                  <c:v>135.0</c:v>
+                  <c:v>141.0</c:v>
                 </c:pt>
                 <c:pt idx="3">
-                  <c:v>139.0</c:v>
+                  <c:v>144.0</c:v>
                 </c:pt>
                 <c:pt idx="4">
-                  <c:v>157.0</c:v>
+                  <c:v>151.0</c:v>
                 </c:pt>
                 <c:pt idx="5">
-                  <c:v>157.5</c:v>
+                  <c:v>175.0</c:v>
                 </c:pt>
               </c:numCache>
             </c:numRef>
@@ -303,7 +303,7 @@
       <c:valAx>
         <c:axId val="-2113994440"/>
         <c:scaling>
-          <c:max val="181.125"/>
+          <c:max val="201.24999999999997"/>
           <c:min val="0.0"/>
         </c:scaling>
         <c:delete/>
@@ -457,64 +457,64 @@
                 <c:formatCode>#,##0;[Red](#,##0)</c:formatCode>
                 <c:ptCount val="20"/>
                 <c:pt idx="0">
-                  <c:v>317.5</c:v>
+                  <c:v>381.0</c:v>
                 </c:pt>
                 <c:pt idx="1">
-                  <c:v>392.0</c:v>
+                  <c:v>373.5</c:v>
                 </c:pt>
                 <c:pt idx="2">
-                  <c:v>363.5</c:v>
+                  <c:v>383.5</c:v>
                 </c:pt>
                 <c:pt idx="3">
-                  <c:v>399.0</c:v>
+                  <c:v>387.5</c:v>
                 </c:pt>
                 <c:pt idx="4">
-                  <c:v>422.0</c:v>
+                  <c:v>376.5</c:v>
                 </c:pt>
                 <c:pt idx="5">
-                  <c:v>451.5</c:v>
+                  <c:v>444.0</c:v>
                 </c:pt>
                 <c:pt idx="6">
-                  <c:v>445.0</c:v>
+                  <c:v>422.5</c:v>
                 </c:pt>
                 <c:pt idx="7">
-                  <c:v>513.0</c:v>
+                  <c:v>562.0</c:v>
                 </c:pt>
                 <c:pt idx="8">
-                  <c:v>529.0</c:v>
+                  <c:v>568.0</c:v>
                 </c:pt>
                 <c:pt idx="9">
-                  <c:v>586.0</c:v>
+                  <c:v>609.5</c:v>
                 </c:pt>
                 <c:pt idx="10">
-                  <c:v>560.5</c:v>
+                  <c:v>627.0</c:v>
                 </c:pt>
                 <c:pt idx="11">
-                  <c:v>625.5</c:v>
+                  <c:v>708.5</c:v>
                 </c:pt>
                 <c:pt idx="12">
-                  <c:v>669.5</c:v>
+                  <c:v>817.0</c:v>
                 </c:pt>
                 <c:pt idx="13">
-                  <c:v>626.5</c:v>
+                  <c:v>780.5</c:v>
                 </c:pt>
                 <c:pt idx="14">
-                  <c:v>683.0</c:v>
+                  <c:v>830.5</c:v>
                 </c:pt>
                 <c:pt idx="15">
-                  <c:v>711.5</c:v>
+                  <c:v>817.5</c:v>
                 </c:pt>
                 <c:pt idx="16">
-                  <c:v>700.0</c:v>
+                  <c:v>781.0</c:v>
                 </c:pt>
                 <c:pt idx="17">
-                  <c:v>772.0</c:v>
+                  <c:v>870.0</c:v>
                 </c:pt>
                 <c:pt idx="18">
-                  <c:v>794.5</c:v>
+                  <c:v>816.0</c:v>
                 </c:pt>
                 <c:pt idx="19">
-                  <c:v>811.0</c:v>
+                  <c:v>830.5</c:v>
                 </c:pt>
               </c:numCache>
             </c:numRef>
@@ -1088,7 +1088,7 @@
           <a:lstStyle/>
           <a:p>
             <a:r>
-              <a:t>How many volunteer hours go into each program?. Volunteer hours, May: 811.0 h; Volunteers who did a shift, May: 55; Hours per volunteer, May: 14.7 h; May last year: 513.0 h. 55 volunteers gave 811.0 h in May, against 794.5 h in April. Housing support drew the most (157.5 h, 19.4%). Volunteer coordinator had the fewest volunteer hours (104.5 h). Hours are up 58.1% on May last year.</a:t>
+              <a:t>How many volunteer hours go into each program?. Volunteer hours, May: 830.5 h; Volunteers who did a shift, May: 59; Hours per volunteer, May: 14.1 h; May last year: 562.0 h. 59 volunteers gave 830.5 h in May, against 816.0 h in April. Mental health first aid drew the most (175.0 h, 21.1%). Volunteer coordinator had the fewest volunteer hours (95.0 h). Hours are up 47.8% on May last year.</a:t>
             </a:r>
           </a:p>
         </p:txBody>
@@ -4573,7 +4573,7 @@
                 </a:solidFill>
                 <a:latin typeface="Roboto"/>
               </a:rPr>
-              <a:t>Data retrieved 2pm, Tue 6 Oct 2026 · Generated 8 Oct 2026, 6:29pm · Sample data · Made with Python (python-pptx)</a:t>
+              <a:t>Data retrieved 2pm, Tue 6 Oct 2026 · Generated 8 Oct 2026, 11:41pm · Sample data · Made with Python (python-pptx)</a:t>
             </a:r>
           </a:p>
         </p:txBody>
@@ -4919,7 +4919,7 @@
                 </a:solidFill>
                 <a:latin typeface="Roboto"/>
               </a:rPr>
-              <a:t>811.0 h</a:t>
+              <a:t>830.5 h</a:t>
             </a:r>
           </a:p>
         </p:txBody>
@@ -4958,7 +4958,7 @@
                 </a:solidFill>
                 <a:latin typeface="Roboto"/>
               </a:rPr>
-              <a:t>April 794.5 h</a:t>
+              <a:t>April 816.0 h</a:t>
             </a:r>
           </a:p>
         </p:txBody>
@@ -5085,7 +5085,7 @@
                 </a:solidFill>
                 <a:latin typeface="Roboto"/>
               </a:rPr>
-              <a:t>55</a:t>
+              <a:t>59</a:t>
             </a:r>
           </a:p>
         </p:txBody>
@@ -5124,7 +5124,7 @@
                 </a:solidFill>
                 <a:latin typeface="Roboto"/>
               </a:rPr>
-              <a:t>April 53</a:t>
+              <a:t>April 58</a:t>
             </a:r>
           </a:p>
         </p:txBody>
@@ -5251,7 +5251,7 @@
                 </a:solidFill>
                 <a:latin typeface="Roboto"/>
               </a:rPr>
-              <a:t>14.7 h</a:t>
+              <a:t>14.1 h</a:t>
             </a:r>
           </a:p>
         </p:txBody>
@@ -5417,7 +5417,7 @@
                 </a:solidFill>
                 <a:latin typeface="Roboto"/>
               </a:rPr>
-              <a:t>513.0 h</a:t>
+              <a:t>562.0 h</a:t>
             </a:r>
           </a:p>
         </p:txBody>
@@ -5456,7 +5456,7 @@
                 </a:solidFill>
                 <a:latin typeface="Roboto"/>
               </a:rPr>
-              <a:t>35 volunteers</a:t>
+              <a:t>34 volunteers</a:t>
             </a:r>
           </a:p>
         </p:txBody>
@@ -5601,7 +5601,7 @@
                 </a:solidFill>
                 <a:latin typeface="Roboto"/>
               </a:rPr>
-              <a:t>55 volunteers gave 811.0 h in May, against 794.5 h in April. Housing support drew the most (157.5 h, 19.4%).</a:t>
+              <a:t>59 volunteers gave 830.5 h in May, against 816.0 h in April. Mental health first aid drew the most (175.0 h, 21.1%).</a:t>
             </a:r>
           </a:p>
         </p:txBody>
@@ -5728,7 +5728,7 @@
                 </a:solidFill>
                 <a:latin typeface="Roboto"/>
               </a:rPr>
-              <a:t>Volunteer coordinator had the fewest volunteer hours (104.5 h). Hours are up 58.1% on May last year.</a:t>
+              <a:t>Volunteer coordinator had the fewest volunteer hours (95.0 h). Hours are up 47.8% on May last year.</a:t>
             </a:r>
           </a:p>
         </p:txBody>
@@ -5806,7 +5806,7 @@
                 </a:solidFill>
                 <a:latin typeface="Roboto"/>
               </a:rPr>
-              <a:t>Data retrieved 2pm, Tue 6 Oct 2026 · Generated 8 Oct 2026, 6:29pm · Sample data · Made with Python (python-pptx)</a:t>
+              <a:t>Data retrieved 2pm, Tue 6 Oct 2026 · Generated 8 Oct 2026, 11:41pm · Sample data · Made with Python (python-pptx)</a:t>
             </a:r>
           </a:p>
         </p:txBody>
@@ -6121,7 +6121,7 @@
                 </a:solidFill>
                 <a:latin typeface="Roboto"/>
               </a:rPr>
-              <a:t>Data retrieved 2pm, Tue 6 Oct 2026 · Generated 8 Oct 2026, 6:29pm · Sample data · Made with Python (python-pptx)</a:t>
+              <a:t>Data retrieved 2pm, Tue 6 Oct 2026 · Generated 8 Oct 2026, 11:41pm · Sample data · Made with Python (python-pptx)</a:t>
             </a:r>
           </a:p>
         </p:txBody>

--- a/media/exports/reports/2026-05/volunteers.pptx
+++ b/media/exports/reports/2026-05/volunteers.pptx
@@ -1018,7 +1018,7 @@
           <a:lstStyle/>
           <a:p>
             <a:r>
-              <a:t>How many volunteer hours go into each program?. Sample Community Services Ltd. Period: May 2026. Every volunteer shift: who (a code, not a name), which program, and how many hours.</a:t>
+              <a:t>How many volunteer hours go into each program?. Sample Community Services Ltd. Period: May 2026. In short: 830.5 h of volunteer time in May, from 59 volunteers; most went to Mental health first aid. Every volunteer shift: who (a code, not a name), which program, and how many hours.</a:t>
             </a:r>
           </a:p>
         </p:txBody>
@@ -4383,7 +4383,7 @@
         <p:spPr>
           <a:xfrm>
             <a:off x="457200" y="3703320"/>
-            <a:ext cx="11277295" cy="313690"/>
+            <a:ext cx="11277295" cy="535940"/>
           </a:xfrm>
           <a:prstGeom prst="rect">
             <a:avLst/>
@@ -4408,7 +4408,7 @@
                 </a:solidFill>
                 <a:latin typeface="Roboto"/>
               </a:rPr>
-              <a:t>Period: May 2026. Every volunteer shift: who (a code, not a name), which program, and how many hours.</a:t>
+              <a:t>Period: May 2026. In short: 830.5 h of volunteer time in May, from 59 volunteers; most went to Mental health first aid. Every volunteer shift: who (a code, not a name), which program, and how many hours.</a:t>
             </a:r>
           </a:p>
         </p:txBody>
@@ -4421,7 +4421,7 @@
         </p:nvSpPr>
         <p:spPr>
           <a:xfrm>
-            <a:off x="457200" y="4108450"/>
+            <a:off x="457200" y="4330700"/>
             <a:ext cx="11277295" cy="1097280"/>
           </a:xfrm>
           <a:prstGeom prst="rect">
@@ -4573,7 +4573,7 @@
                 </a:solidFill>
                 <a:latin typeface="Roboto"/>
               </a:rPr>
-              <a:t>Data retrieved 2pm, Tue 6 Oct 2026 · Generated 8 Oct 2026, 11:41pm · Sample data · Made with Python (python-pptx)</a:t>
+              <a:t>Data retrieved 2pm, Tue 6 Oct 2026 · Generated 10 Oct 2026, 9:55pm · Sample data · Made with Python (python-pptx)</a:t>
             </a:r>
           </a:p>
         </p:txBody>
@@ -5806,7 +5806,7 @@
                 </a:solidFill>
                 <a:latin typeface="Roboto"/>
               </a:rPr>
-              <a:t>Data retrieved 2pm, Tue 6 Oct 2026 · Generated 8 Oct 2026, 11:41pm · Sample data · Made with Python (python-pptx)</a:t>
+              <a:t>Data retrieved 2pm, Tue 6 Oct 2026 · Generated 10 Oct 2026, 9:55pm · Sample data · Made with Python (python-pptx)</a:t>
             </a:r>
           </a:p>
         </p:txBody>
@@ -6121,7 +6121,7 @@
                 </a:solidFill>
                 <a:latin typeface="Roboto"/>
               </a:rPr>
-              <a:t>Data retrieved 2pm, Tue 6 Oct 2026 · Generated 8 Oct 2026, 11:41pm · Sample data · Made with Python (python-pptx)</a:t>
+              <a:t>Data retrieved 2pm, Tue 6 Oct 2026 · Generated 10 Oct 2026, 9:55pm · Sample data · Made with Python (python-pptx)</a:t>
             </a:r>
           </a:p>
         </p:txBody>
